--- a/專案進度報告_吳紹郁_20241121.pptx
+++ b/專案進度報告_吳紹郁_20241121.pptx
@@ -5,22 +5,23 @@
     <p:sldMasterId id="2147483648" r:id="rId1"/>
   </p:sldMasterIdLst>
   <p:notesMasterIdLst>
-    <p:notesMasterId r:id="rId12"/>
+    <p:notesMasterId r:id="rId13"/>
   </p:notesMasterIdLst>
   <p:handoutMasterIdLst>
-    <p:handoutMasterId r:id="rId13"/>
+    <p:handoutMasterId r:id="rId14"/>
   </p:handoutMasterIdLst>
   <p:sldIdLst>
     <p:sldId id="259" r:id="rId2"/>
     <p:sldId id="372" r:id="rId3"/>
     <p:sldId id="261" r:id="rId4"/>
     <p:sldId id="267" r:id="rId5"/>
-    <p:sldId id="1250" r:id="rId6"/>
-    <p:sldId id="1256" r:id="rId7"/>
-    <p:sldId id="1136" r:id="rId8"/>
-    <p:sldId id="1143" r:id="rId9"/>
-    <p:sldId id="302" r:id="rId10"/>
-    <p:sldId id="271" r:id="rId11"/>
+    <p:sldId id="1257" r:id="rId6"/>
+    <p:sldId id="1250" r:id="rId7"/>
+    <p:sldId id="1256" r:id="rId8"/>
+    <p:sldId id="1136" r:id="rId9"/>
+    <p:sldId id="1143" r:id="rId10"/>
+    <p:sldId id="302" r:id="rId11"/>
+    <p:sldId id="271" r:id="rId12"/>
   </p:sldIdLst>
   <p:sldSz cx="12192000" cy="6858000"/>
   <p:notesSz cx="6858000" cy="9144000"/>
@@ -143,6 +144,7 @@
         </p14:section>
         <p14:section name="系統分析" id="{9A21F2E2-4FC0-4A62-9703-93430BA9593A}">
           <p14:sldIdLst>
+            <p14:sldId id="1257"/>
             <p14:sldId id="1250"/>
             <p14:sldId id="1256"/>
           </p14:sldIdLst>
@@ -1395,7 +1397,7 @@
           <a:p>
             <a:fld id="{EF8A6B0B-A5FB-4629-B823-69B1A9EB3A43}" type="slidenum">
               <a:rPr lang="zh-TW" altLang="en-US" smtClean="0"/>
-              <a:t>8</a:t>
+              <a:t>9</a:t>
             </a:fld>
             <a:endParaRPr lang="zh-TW" altLang="en-US"/>
           </a:p>
@@ -1479,7 +1481,7 @@
           <a:p>
             <a:fld id="{EF8A6B0B-A5FB-4629-B823-69B1A9EB3A43}" type="slidenum">
               <a:rPr lang="zh-TW" altLang="en-US" smtClean="0"/>
-              <a:t>9</a:t>
+              <a:t>10</a:t>
             </a:fld>
             <a:endParaRPr lang="zh-TW" altLang="en-US"/>
           </a:p>
@@ -4854,6 +4856,268 @@
         </p:nvSpPr>
         <p:spPr>
           <a:xfrm>
+            <a:off x="838199" y="1201850"/>
+            <a:ext cx="11048999" cy="5026422"/>
+          </a:xfrm>
+        </p:spPr>
+        <p:txBody>
+          <a:bodyPr/>
+          <a:lstStyle/>
+          <a:p>
+            <a:r>
+              <a:rPr lang="en-US" altLang="zh-TW" dirty="0"/>
+              <a:t>Q1</a:t>
+            </a:r>
+            <a:r>
+              <a:rPr lang="zh-TW" altLang="en-US" dirty="0"/>
+              <a:t>：製作第二題時，可以上數，無法下數。</a:t>
+            </a:r>
+            <a:r>
+              <a:rPr lang="en-US" altLang="zh-TW" dirty="0"/>
+              <a:t> [</a:t>
+            </a:r>
+            <a:r>
+              <a:rPr lang="zh-TW" altLang="en-US" dirty="0"/>
+              <a:t>圖</a:t>
+            </a:r>
+            <a:r>
+              <a:rPr lang="en-US" altLang="zh-TW" dirty="0"/>
+              <a:t>1]</a:t>
+            </a:r>
+            <a:br>
+              <a:rPr lang="en-US" altLang="zh-TW" dirty="0"/>
+            </a:br>
+            <a:endParaRPr lang="en-US" altLang="zh-TW" dirty="0"/>
+          </a:p>
+          <a:p>
+            <a:endParaRPr lang="en-US" altLang="zh-TW" sz="1200" dirty="0"/>
+          </a:p>
+          <a:p>
+            <a:endParaRPr lang="en-US" altLang="zh-TW" sz="1200" dirty="0"/>
+          </a:p>
+          <a:p>
+            <a:endParaRPr lang="en-US" altLang="zh-TW" sz="1200" dirty="0"/>
+          </a:p>
+          <a:p>
+            <a:endParaRPr lang="en-US" altLang="zh-TW" sz="1200" dirty="0"/>
+          </a:p>
+          <a:p>
+            <a:endParaRPr lang="en-US" altLang="zh-TW" sz="1200" dirty="0"/>
+          </a:p>
+          <a:p>
+            <a:endParaRPr lang="en-US" altLang="zh-TW" sz="1200" dirty="0"/>
+          </a:p>
+          <a:p>
+            <a:endParaRPr lang="en-US" altLang="zh-TW" sz="1200" dirty="0"/>
+          </a:p>
+          <a:p>
+            <a:endParaRPr lang="en-US" altLang="zh-TW" sz="1200" dirty="0"/>
+          </a:p>
+          <a:p>
+            <a:endParaRPr lang="en-US" altLang="zh-TW" sz="1200" dirty="0"/>
+          </a:p>
+          <a:p>
+            <a:endParaRPr lang="en-US" altLang="zh-TW" sz="1200" dirty="0"/>
+          </a:p>
+          <a:p>
+            <a:endParaRPr lang="en-US" altLang="zh-TW" sz="1200" dirty="0"/>
+          </a:p>
+          <a:p>
+            <a:endParaRPr lang="en-US" altLang="zh-TW" sz="1200" dirty="0"/>
+          </a:p>
+          <a:p>
+            <a:pPr marL="0" indent="0">
+              <a:buNone/>
+            </a:pPr>
+            <a:endParaRPr lang="en-US" altLang="zh-TW" sz="1200" dirty="0"/>
+          </a:p>
+          <a:p>
+            <a:pPr marL="0" indent="0">
+              <a:buNone/>
+            </a:pPr>
+            <a:endParaRPr lang="en-US" altLang="zh-TW" sz="1200" dirty="0"/>
+          </a:p>
+        </p:txBody>
+      </p:sp>
+      <p:sp>
+        <p:nvSpPr>
+          <p:cNvPr id="3" name="標題 2"/>
+          <p:cNvSpPr>
+            <a:spLocks noGrp="1"/>
+          </p:cNvSpPr>
+          <p:nvPr>
+            <p:ph type="title"/>
+          </p:nvPr>
+        </p:nvSpPr>
+        <p:spPr/>
+        <p:txBody>
+          <a:bodyPr/>
+          <a:lstStyle/>
+          <a:p>
+            <a:r>
+              <a:rPr lang="zh-TW" altLang="en-US" dirty="0"/>
+              <a:t>問題記錄 </a:t>
+            </a:r>
+            <a:r>
+              <a:rPr lang="en-US" altLang="zh-TW" dirty="0"/>
+              <a:t>(</a:t>
+            </a:r>
+            <a:r>
+              <a:rPr lang="zh-TW" altLang="en-US" dirty="0">
+                <a:solidFill>
+                  <a:srgbClr val="FF0000"/>
+                </a:solidFill>
+                <a:highlight>
+                  <a:srgbClr val="FFFF00"/>
+                </a:highlight>
+              </a:rPr>
+              <a:t>軟體問題</a:t>
+            </a:r>
+            <a:r>
+              <a:rPr lang="en-US" altLang="zh-TW" dirty="0"/>
+              <a:t>)</a:t>
+            </a:r>
+            <a:endParaRPr lang="zh-TW" altLang="en-US" dirty="0"/>
+          </a:p>
+        </p:txBody>
+      </p:sp>
+      <p:sp>
+        <p:nvSpPr>
+          <p:cNvPr id="17" name="矩形 16">
+            <a:extLst>
+              <a:ext uri="{FF2B5EF4-FFF2-40B4-BE49-F238E27FC236}">
+                <a16:creationId xmlns:a16="http://schemas.microsoft.com/office/drawing/2014/main" id="{D93CB8E4-DED4-4E55-B426-B2D6694EE6B7}"/>
+              </a:ext>
+            </a:extLst>
+          </p:cNvPr>
+          <p:cNvSpPr/>
+          <p:nvPr/>
+        </p:nvSpPr>
+        <p:spPr>
+          <a:xfrm>
+            <a:off x="5493912" y="4081108"/>
+            <a:ext cx="1204176" cy="369332"/>
+          </a:xfrm>
+          <a:prstGeom prst="rect">
+            <a:avLst/>
+          </a:prstGeom>
+        </p:spPr>
+        <p:txBody>
+          <a:bodyPr wrap="none">
+            <a:spAutoFit/>
+          </a:bodyPr>
+          <a:lstStyle/>
+          <a:p>
+            <a:pPr algn="ctr"/>
+            <a:r>
+              <a:rPr lang="en-US" altLang="zh-TW" dirty="0">
+                <a:latin typeface="Times New Roman" panose="02020603050405020304" pitchFamily="18" charset="0"/>
+                <a:ea typeface="標楷體" panose="03000509000000000000" pitchFamily="65" charset="-120"/>
+              </a:rPr>
+              <a:t>[</a:t>
+            </a:r>
+            <a:r>
+              <a:rPr lang="zh-TW" altLang="en-US" dirty="0">
+                <a:latin typeface="Times New Roman" panose="02020603050405020304" pitchFamily="18" charset="0"/>
+                <a:ea typeface="標楷體" panose="03000509000000000000" pitchFamily="65" charset="-120"/>
+              </a:rPr>
+              <a:t>圖</a:t>
+            </a:r>
+            <a:r>
+              <a:rPr lang="en-US" altLang="zh-TW" dirty="0">
+                <a:latin typeface="Times New Roman" panose="02020603050405020304" pitchFamily="18" charset="0"/>
+                <a:ea typeface="標楷體" panose="03000509000000000000" pitchFamily="65" charset="-120"/>
+              </a:rPr>
+              <a:t>1]</a:t>
+            </a:r>
+            <a:r>
+              <a:rPr lang="zh-TW" altLang="en-US" dirty="0">
+                <a:latin typeface="Times New Roman" panose="02020603050405020304" pitchFamily="18" charset="0"/>
+                <a:ea typeface="標楷體" panose="03000509000000000000" pitchFamily="65" charset="-120"/>
+              </a:rPr>
+              <a:t> 問題</a:t>
+            </a:r>
+          </a:p>
+        </p:txBody>
+      </p:sp>
+      <p:pic>
+        <p:nvPicPr>
+          <p:cNvPr id="5" name="圖片 4" descr="一張含有 螢幕擷取畫面, 多媒體軟體 的圖片&#10;&#10;自動產生的描述">
+            <a:extLst>
+              <a:ext uri="{FF2B5EF4-FFF2-40B4-BE49-F238E27FC236}">
+                <a16:creationId xmlns:a16="http://schemas.microsoft.com/office/drawing/2014/main" id="{E1F3A329-73C7-A0B9-5840-4FC9040D30A0}"/>
+              </a:ext>
+            </a:extLst>
+          </p:cNvPr>
+          <p:cNvPicPr>
+            <a:picLocks noChangeAspect="1"/>
+          </p:cNvPicPr>
+          <p:nvPr/>
+        </p:nvPicPr>
+        <p:blipFill>
+          <a:blip r:embed="rId3">
+            <a:extLst>
+              <a:ext uri="{28A0092B-C50C-407E-A947-70E740481C1C}">
+                <a14:useLocalDpi xmlns:a14="http://schemas.microsoft.com/office/drawing/2010/main" val="0"/>
+              </a:ext>
+            </a:extLst>
+          </a:blip>
+          <a:stretch>
+            <a:fillRect/>
+          </a:stretch>
+        </p:blipFill>
+        <p:spPr>
+          <a:xfrm>
+            <a:off x="919715" y="1571182"/>
+            <a:ext cx="9830056" cy="2521056"/>
+          </a:xfrm>
+          <a:prstGeom prst="rect">
+            <a:avLst/>
+          </a:prstGeom>
+        </p:spPr>
+      </p:pic>
+    </p:spTree>
+    <p:extLst>
+      <p:ext uri="{BB962C8B-B14F-4D97-AF65-F5344CB8AC3E}">
+        <p14:creationId xmlns:p14="http://schemas.microsoft.com/office/powerpoint/2010/main" val="1403700655"/>
+      </p:ext>
+    </p:extLst>
+  </p:cSld>
+  <p:clrMapOvr>
+    <a:masterClrMapping/>
+  </p:clrMapOvr>
+</p:sld>
+</file>
+
+<file path=ppt/slides/slide11.xml><?xml version="1.0" encoding="utf-8"?>
+<p:sld xmlns:a="http://schemas.openxmlformats.org/drawingml/2006/main" xmlns:r="http://schemas.openxmlformats.org/officeDocument/2006/relationships" xmlns:p="http://schemas.openxmlformats.org/presentationml/2006/main">
+  <p:cSld>
+    <p:spTree>
+      <p:nvGrpSpPr>
+        <p:cNvPr id="1" name=""/>
+        <p:cNvGrpSpPr/>
+        <p:nvPr/>
+      </p:nvGrpSpPr>
+      <p:grpSpPr>
+        <a:xfrm>
+          <a:off x="0" y="0"/>
+          <a:ext cx="0" cy="0"/>
+          <a:chOff x="0" y="0"/>
+          <a:chExt cx="0" cy="0"/>
+        </a:xfrm>
+      </p:grpSpPr>
+      <p:sp>
+        <p:nvSpPr>
+          <p:cNvPr id="2" name="內容版面配置區 1"/>
+          <p:cNvSpPr>
+            <a:spLocks noGrp="1"/>
+          </p:cNvSpPr>
+          <p:nvPr>
+            <p:ph idx="1"/>
+          </p:nvPr>
+        </p:nvSpPr>
+        <p:spPr>
+          <a:xfrm>
             <a:off x="838200" y="1201850"/>
             <a:ext cx="10515600" cy="5037776"/>
           </a:xfrm>
@@ -5016,13 +5280,47 @@
           <a:chExt cx="0" cy="0"/>
         </a:xfrm>
       </p:grpSpPr>
+      <p:sp>
+        <p:nvSpPr>
+          <p:cNvPr id="3" name="標題 2"/>
+          <p:cNvSpPr>
+            <a:spLocks noGrp="1"/>
+          </p:cNvSpPr>
+          <p:nvPr>
+            <p:ph type="title"/>
+          </p:nvPr>
+        </p:nvSpPr>
+        <p:spPr/>
+        <p:txBody>
+          <a:bodyPr/>
+          <a:lstStyle/>
+          <a:p>
+            <a:r>
+              <a:rPr lang="zh-TW" altLang="en-US" dirty="0"/>
+              <a:t>控管記錄 </a:t>
+            </a:r>
+            <a:r>
+              <a:rPr lang="en-US" altLang="zh-TW" dirty="0"/>
+              <a:t>-</a:t>
+            </a:r>
+            <a:r>
+              <a:rPr lang="zh-TW" altLang="en-US" dirty="0"/>
+              <a:t> </a:t>
+            </a:r>
+            <a:r>
+              <a:rPr lang="en-US" altLang="zh-TW" dirty="0"/>
+              <a:t>Git (2025/02/06)</a:t>
+            </a:r>
+            <a:endParaRPr lang="zh-TW" altLang="en-US" dirty="0"/>
+          </a:p>
+        </p:txBody>
+      </p:sp>
       <p:pic>
         <p:nvPicPr>
-          <p:cNvPr id="5" name="圖片 4">
-            <a:hlinkClick r:id="rId2"/>
+          <p:cNvPr id="4" name="圖片 3">
             <a:extLst>
               <a:ext uri="{FF2B5EF4-FFF2-40B4-BE49-F238E27FC236}">
-                <a16:creationId xmlns:a16="http://schemas.microsoft.com/office/drawing/2014/main" id="{59F8B3B3-F005-C115-4306-F29AD4BA6E31}"/>
+                <a16:creationId xmlns:a16="http://schemas.microsoft.com/office/drawing/2014/main" id="{CF940ACB-50E8-DFDA-7201-DAAA7444F2EE}"/>
               </a:ext>
             </a:extLst>
           </p:cNvPr>
@@ -5032,56 +5330,21 @@
           <p:nvPr/>
         </p:nvPicPr>
         <p:blipFill>
-          <a:blip r:embed="rId3"/>
+          <a:blip r:embed="rId2"/>
           <a:stretch>
             <a:fillRect/>
           </a:stretch>
         </p:blipFill>
         <p:spPr>
           <a:xfrm>
-            <a:off x="2033319" y="1233575"/>
-            <a:ext cx="8125364" cy="4910293"/>
+            <a:off x="1266151" y="2457314"/>
+            <a:ext cx="9659698" cy="1943371"/>
           </a:xfrm>
           <a:prstGeom prst="rect">
             <a:avLst/>
           </a:prstGeom>
         </p:spPr>
       </p:pic>
-      <p:sp>
-        <p:nvSpPr>
-          <p:cNvPr id="3" name="標題 2"/>
-          <p:cNvSpPr>
-            <a:spLocks noGrp="1"/>
-          </p:cNvSpPr>
-          <p:nvPr>
-            <p:ph type="title"/>
-          </p:nvPr>
-        </p:nvSpPr>
-        <p:spPr/>
-        <p:txBody>
-          <a:bodyPr/>
-          <a:lstStyle/>
-          <a:p>
-            <a:r>
-              <a:rPr lang="zh-TW" altLang="en-US" dirty="0"/>
-              <a:t>控管記錄 </a:t>
-            </a:r>
-            <a:r>
-              <a:rPr lang="en-US" altLang="zh-TW" dirty="0"/>
-              <a:t>-</a:t>
-            </a:r>
-            <a:r>
-              <a:rPr lang="zh-TW" altLang="en-US" dirty="0"/>
-              <a:t> </a:t>
-            </a:r>
-            <a:r>
-              <a:rPr lang="en-US" altLang="zh-TW" dirty="0"/>
-              <a:t>Git (2024/11/18)</a:t>
-            </a:r>
-            <a:endParaRPr lang="zh-TW" altLang="en-US" dirty="0"/>
-          </a:p>
-        </p:txBody>
-      </p:sp>
     </p:spTree>
     <p:extLst>
       <p:ext uri="{BB962C8B-B14F-4D97-AF65-F5344CB8AC3E}">
@@ -5690,6 +5953,133 @@
   <p:cSld>
     <p:spTree>
       <p:nvGrpSpPr>
+        <p:cNvPr id="1" name="">
+          <a:extLst>
+            <a:ext uri="{FF2B5EF4-FFF2-40B4-BE49-F238E27FC236}">
+              <a16:creationId xmlns:a16="http://schemas.microsoft.com/office/drawing/2014/main" id="{0A75E7E1-0A69-CF7A-836F-31766A9E10A9}"/>
+            </a:ext>
+          </a:extLst>
+        </p:cNvPr>
+        <p:cNvGrpSpPr/>
+        <p:nvPr/>
+      </p:nvGrpSpPr>
+      <p:grpSpPr>
+        <a:xfrm>
+          <a:off x="0" y="0"/>
+          <a:ext cx="0" cy="0"/>
+          <a:chOff x="0" y="0"/>
+          <a:chExt cx="0" cy="0"/>
+        </a:xfrm>
+      </p:grpSpPr>
+      <p:sp>
+        <p:nvSpPr>
+          <p:cNvPr id="4" name="標題 3">
+            <a:extLst>
+              <a:ext uri="{FF2B5EF4-FFF2-40B4-BE49-F238E27FC236}">
+                <a16:creationId xmlns:a16="http://schemas.microsoft.com/office/drawing/2014/main" id="{1410C02D-C43F-05CC-6D1A-9998DF8844AB}"/>
+              </a:ext>
+            </a:extLst>
+          </p:cNvPr>
+          <p:cNvSpPr>
+            <a:spLocks noGrp="1"/>
+          </p:cNvSpPr>
+          <p:nvPr>
+            <p:ph type="title"/>
+          </p:nvPr>
+        </p:nvSpPr>
+        <p:spPr/>
+        <p:txBody>
+          <a:bodyPr/>
+          <a:lstStyle/>
+          <a:p>
+            <a:r>
+              <a:rPr lang="en-US" altLang="zh-TW" dirty="0"/>
+              <a:t>Breakdown(</a:t>
+            </a:r>
+            <a:r>
+              <a:rPr lang="en-US" altLang="zh-TW" dirty="0">
+                <a:solidFill>
+                  <a:srgbClr val="FF0000"/>
+                </a:solidFill>
+                <a:highlight>
+                  <a:srgbClr val="FFFF00"/>
+                </a:highlight>
+              </a:rPr>
+              <a:t>2025/02/05</a:t>
+            </a:r>
+            <a:r>
+              <a:rPr lang="zh-TW" altLang="en-US" dirty="0">
+                <a:solidFill>
+                  <a:srgbClr val="FF0000"/>
+                </a:solidFill>
+                <a:highlight>
+                  <a:srgbClr val="FFFF00"/>
+                </a:highlight>
+              </a:rPr>
+              <a:t>更新</a:t>
+            </a:r>
+            <a:r>
+              <a:rPr lang="en-US" altLang="zh-TW" dirty="0"/>
+              <a:t>)</a:t>
+            </a:r>
+            <a:endParaRPr lang="zh-TW" altLang="en-US" dirty="0"/>
+          </a:p>
+        </p:txBody>
+      </p:sp>
+      <p:pic>
+        <p:nvPicPr>
+          <p:cNvPr id="3" name="圖片 2" descr="一張含有 圖表, 行, 文字, Rectangle 的圖片&#10;&#10;自動產生的描述">
+            <a:extLst>
+              <a:ext uri="{FF2B5EF4-FFF2-40B4-BE49-F238E27FC236}">
+                <a16:creationId xmlns:a16="http://schemas.microsoft.com/office/drawing/2014/main" id="{F910D19D-FC9E-DCD4-A8F6-03B37B2C1344}"/>
+              </a:ext>
+            </a:extLst>
+          </p:cNvPr>
+          <p:cNvPicPr>
+            <a:picLocks noChangeAspect="1"/>
+          </p:cNvPicPr>
+          <p:nvPr/>
+        </p:nvPicPr>
+        <p:blipFill>
+          <a:blip r:embed="rId2">
+            <a:extLst>
+              <a:ext uri="{28A0092B-C50C-407E-A947-70E740481C1C}">
+                <a14:useLocalDpi xmlns:a14="http://schemas.microsoft.com/office/drawing/2010/main" val="0"/>
+              </a:ext>
+            </a:extLst>
+          </a:blip>
+          <a:stretch>
+            <a:fillRect/>
+          </a:stretch>
+        </p:blipFill>
+        <p:spPr>
+          <a:xfrm>
+            <a:off x="4249101" y="2475400"/>
+            <a:ext cx="3693798" cy="2149353"/>
+          </a:xfrm>
+          <a:prstGeom prst="rect">
+            <a:avLst/>
+          </a:prstGeom>
+        </p:spPr>
+      </p:pic>
+    </p:spTree>
+    <p:extLst>
+      <p:ext uri="{BB962C8B-B14F-4D97-AF65-F5344CB8AC3E}">
+        <p14:creationId xmlns:p14="http://schemas.microsoft.com/office/powerpoint/2010/main" val="1467432541"/>
+      </p:ext>
+    </p:extLst>
+  </p:cSld>
+  <p:clrMapOvr>
+    <a:masterClrMapping/>
+  </p:clrMapOvr>
+</p:sld>
+</file>
+
+<file path=ppt/slides/slide6.xml><?xml version="1.0" encoding="utf-8"?>
+<p:sld xmlns:a="http://schemas.openxmlformats.org/drawingml/2006/main" xmlns:r="http://schemas.openxmlformats.org/officeDocument/2006/relationships" xmlns:p="http://schemas.openxmlformats.org/presentationml/2006/main">
+  <p:cSld>
+    <p:spTree>
+      <p:nvGrpSpPr>
         <p:cNvPr id="1" name=""/>
         <p:cNvGrpSpPr/>
         <p:nvPr/>
@@ -5750,7 +6140,7 @@
                   <a:srgbClr val="FFFF00"/>
                 </a:highlight>
               </a:rPr>
-              <a:t>2024/11/19</a:t>
+              <a:t>2025/02/05</a:t>
             </a:r>
             <a:r>
               <a:rPr lang="zh-TW" altLang="en-US" dirty="0">
@@ -5799,7 +6189,7 @@
         </p:blipFill>
         <p:spPr>
           <a:xfrm>
-            <a:off x="2910470" y="1493773"/>
+            <a:off x="3395662" y="1402213"/>
             <a:ext cx="5400675" cy="828675"/>
           </a:xfrm>
           <a:prstGeom prst="rect">
@@ -5807,6 +6197,1009 @@
           </a:prstGeom>
         </p:spPr>
       </p:pic>
+      <p:graphicFrame>
+        <p:nvGraphicFramePr>
+          <p:cNvPr id="2" name="表格 1">
+            <a:extLst>
+              <a:ext uri="{FF2B5EF4-FFF2-40B4-BE49-F238E27FC236}">
+                <a16:creationId xmlns:a16="http://schemas.microsoft.com/office/drawing/2014/main" id="{163C9BFE-3E30-7EE7-AAF6-0A986F3C7E28}"/>
+              </a:ext>
+            </a:extLst>
+          </p:cNvPr>
+          <p:cNvGraphicFramePr>
+            <a:graphicFrameLocks noGrp="1"/>
+          </p:cNvGraphicFramePr>
+          <p:nvPr>
+            <p:extLst>
+              <p:ext uri="{D42A27DB-BD31-4B8C-83A1-F6EECF244321}">
+                <p14:modId xmlns:p14="http://schemas.microsoft.com/office/powerpoint/2010/main" val="1256004925"/>
+              </p:ext>
+            </p:extLst>
+          </p:nvPr>
+        </p:nvGraphicFramePr>
+        <p:xfrm>
+          <a:off x="605406" y="2547977"/>
+          <a:ext cx="10981188" cy="2291080"/>
+        </p:xfrm>
+        <a:graphic>
+          <a:graphicData uri="http://schemas.openxmlformats.org/drawingml/2006/table">
+            <a:tbl>
+              <a:tblPr firstRow="1" bandRow="1">
+                <a:tableStyleId>{5C22544A-7EE6-4342-B048-85BDC9FD1C3A}</a:tableStyleId>
+              </a:tblPr>
+              <a:tblGrid>
+                <a:gridCol w="1568741">
+                  <a:extLst>
+                    <a:ext uri="{9D8B030D-6E8A-4147-A177-3AD203B41FA5}">
+                      <a16:colId xmlns:a16="http://schemas.microsoft.com/office/drawing/2014/main" val="3569235363"/>
+                    </a:ext>
+                  </a:extLst>
+                </a:gridCol>
+                <a:gridCol w="1568741">
+                  <a:extLst>
+                    <a:ext uri="{9D8B030D-6E8A-4147-A177-3AD203B41FA5}">
+                      <a16:colId xmlns:a16="http://schemas.microsoft.com/office/drawing/2014/main" val="1450778500"/>
+                    </a:ext>
+                  </a:extLst>
+                </a:gridCol>
+                <a:gridCol w="1568741">
+                  <a:extLst>
+                    <a:ext uri="{9D8B030D-6E8A-4147-A177-3AD203B41FA5}">
+                      <a16:colId xmlns:a16="http://schemas.microsoft.com/office/drawing/2014/main" val="1206192564"/>
+                    </a:ext>
+                  </a:extLst>
+                </a:gridCol>
+                <a:gridCol w="1568741">
+                  <a:extLst>
+                    <a:ext uri="{9D8B030D-6E8A-4147-A177-3AD203B41FA5}">
+                      <a16:colId xmlns:a16="http://schemas.microsoft.com/office/drawing/2014/main" val="2157246791"/>
+                    </a:ext>
+                  </a:extLst>
+                </a:gridCol>
+                <a:gridCol w="1568741">
+                  <a:extLst>
+                    <a:ext uri="{9D8B030D-6E8A-4147-A177-3AD203B41FA5}">
+                      <a16:colId xmlns:a16="http://schemas.microsoft.com/office/drawing/2014/main" val="198149183"/>
+                    </a:ext>
+                  </a:extLst>
+                </a:gridCol>
+                <a:gridCol w="3137483">
+                  <a:extLst>
+                    <a:ext uri="{9D8B030D-6E8A-4147-A177-3AD203B41FA5}">
+                      <a16:colId xmlns:a16="http://schemas.microsoft.com/office/drawing/2014/main" val="1194417440"/>
+                    </a:ext>
+                  </a:extLst>
+                </a:gridCol>
+              </a:tblGrid>
+              <a:tr h="370840">
+                <a:tc>
+                  <a:txBody>
+                    <a:bodyPr/>
+                    <a:lstStyle/>
+                    <a:p>
+                      <a:pPr algn="ctr"/>
+                      <a:r>
+                        <a:rPr lang="zh-TW" altLang="en-US" dirty="0">
+                          <a:latin typeface="Times New Roman" panose="02020603050405020304" pitchFamily="18" charset="0"/>
+                          <a:ea typeface="標楷體" panose="03000509000000000000" pitchFamily="65" charset="-120"/>
+                          <a:cs typeface="Times New Roman" panose="02020603050405020304" pitchFamily="18" charset="0"/>
+                        </a:rPr>
+                        <a:t>名稱</a:t>
+                      </a:r>
+                    </a:p>
+                  </a:txBody>
+                  <a:tcPr anchor="ctr"/>
+                </a:tc>
+                <a:tc>
+                  <a:txBody>
+                    <a:bodyPr/>
+                    <a:lstStyle/>
+                    <a:p>
+                      <a:pPr algn="ctr"/>
+                      <a:r>
+                        <a:rPr lang="zh-TW" altLang="en-US" dirty="0">
+                          <a:latin typeface="Times New Roman" panose="02020603050405020304" pitchFamily="18" charset="0"/>
+                          <a:ea typeface="標楷體" panose="03000509000000000000" pitchFamily="65" charset="-120"/>
+                          <a:cs typeface="Times New Roman" panose="02020603050405020304" pitchFamily="18" charset="0"/>
+                        </a:rPr>
+                        <a:t>代號</a:t>
+                      </a:r>
+                    </a:p>
+                  </a:txBody>
+                  <a:tcPr anchor="ctr"/>
+                </a:tc>
+                <a:tc>
+                  <a:txBody>
+                    <a:bodyPr/>
+                    <a:lstStyle/>
+                    <a:p>
+                      <a:pPr algn="ctr"/>
+                      <a:r>
+                        <a:rPr lang="en-US" altLang="zh-TW">
+                          <a:latin typeface="Times New Roman" panose="02020603050405020304" pitchFamily="18" charset="0"/>
+                          <a:ea typeface="標楷體" panose="03000509000000000000" pitchFamily="65" charset="-120"/>
+                          <a:cs typeface="Times New Roman" panose="02020603050405020304" pitchFamily="18" charset="0"/>
+                        </a:rPr>
+                        <a:t>predecessor</a:t>
+                      </a:r>
+                      <a:endParaRPr lang="zh-TW" altLang="en-US">
+                        <a:latin typeface="Times New Roman" panose="02020603050405020304" pitchFamily="18" charset="0"/>
+                        <a:ea typeface="標楷體" panose="03000509000000000000" pitchFamily="65" charset="-120"/>
+                        <a:cs typeface="Times New Roman" panose="02020603050405020304" pitchFamily="18" charset="0"/>
+                      </a:endParaRPr>
+                    </a:p>
+                  </a:txBody>
+                  <a:tcPr anchor="ctr"/>
+                </a:tc>
+                <a:tc>
+                  <a:txBody>
+                    <a:bodyPr/>
+                    <a:lstStyle/>
+                    <a:p>
+                      <a:pPr algn="ctr"/>
+                      <a:r>
+                        <a:rPr lang="en-US" altLang="zh-TW">
+                          <a:latin typeface="Times New Roman" panose="02020603050405020304" pitchFamily="18" charset="0"/>
+                          <a:ea typeface="標楷體" panose="03000509000000000000" pitchFamily="65" charset="-120"/>
+                          <a:cs typeface="Times New Roman" panose="02020603050405020304" pitchFamily="18" charset="0"/>
+                        </a:rPr>
+                        <a:t>Duration</a:t>
+                      </a:r>
+                      <a:endParaRPr lang="zh-TW" altLang="en-US">
+                        <a:latin typeface="Times New Roman" panose="02020603050405020304" pitchFamily="18" charset="0"/>
+                        <a:ea typeface="標楷體" panose="03000509000000000000" pitchFamily="65" charset="-120"/>
+                        <a:cs typeface="Times New Roman" panose="02020603050405020304" pitchFamily="18" charset="0"/>
+                      </a:endParaRPr>
+                    </a:p>
+                  </a:txBody>
+                  <a:tcPr anchor="ctr"/>
+                </a:tc>
+                <a:tc>
+                  <a:txBody>
+                    <a:bodyPr/>
+                    <a:lstStyle/>
+                    <a:p>
+                      <a:pPr algn="ctr"/>
+                      <a:r>
+                        <a:rPr lang="zh-TW" altLang="en-US">
+                          <a:latin typeface="Times New Roman" panose="02020603050405020304" pitchFamily="18" charset="0"/>
+                          <a:ea typeface="標楷體" panose="03000509000000000000" pitchFamily="65" charset="-120"/>
+                          <a:cs typeface="Times New Roman" panose="02020603050405020304" pitchFamily="18" charset="0"/>
+                        </a:rPr>
+                        <a:t>詳細功能</a:t>
+                      </a:r>
+                    </a:p>
+                  </a:txBody>
+                  <a:tcPr anchor="ctr"/>
+                </a:tc>
+                <a:tc>
+                  <a:txBody>
+                    <a:bodyPr/>
+                    <a:lstStyle/>
+                    <a:p>
+                      <a:pPr algn="ctr"/>
+                      <a:r>
+                        <a:rPr lang="zh-TW" altLang="en-US">
+                          <a:latin typeface="Times New Roman" panose="02020603050405020304" pitchFamily="18" charset="0"/>
+                          <a:ea typeface="標楷體" panose="03000509000000000000" pitchFamily="65" charset="-120"/>
+                          <a:cs typeface="Times New Roman" panose="02020603050405020304" pitchFamily="18" charset="0"/>
+                        </a:rPr>
+                        <a:t>輸入</a:t>
+                      </a:r>
+                    </a:p>
+                    <a:p>
+                      <a:pPr algn="ctr"/>
+                      <a:r>
+                        <a:rPr lang="zh-TW" altLang="en-US">
+                          <a:latin typeface="Times New Roman" panose="02020603050405020304" pitchFamily="18" charset="0"/>
+                          <a:ea typeface="標楷體" panose="03000509000000000000" pitchFamily="65" charset="-120"/>
+                          <a:cs typeface="Times New Roman" panose="02020603050405020304" pitchFamily="18" charset="0"/>
+                        </a:rPr>
+                        <a:t>輸出</a:t>
+                      </a:r>
+                    </a:p>
+                  </a:txBody>
+                  <a:tcPr anchor="ctr"/>
+                </a:tc>
+                <a:extLst>
+                  <a:ext uri="{0D108BD9-81ED-4DB2-BD59-A6C34878D82A}">
+                    <a16:rowId xmlns:a16="http://schemas.microsoft.com/office/drawing/2014/main" val="273611731"/>
+                  </a:ext>
+                </a:extLst>
+              </a:tr>
+              <a:tr h="370840">
+                <a:tc>
+                  <a:txBody>
+                    <a:bodyPr/>
+                    <a:lstStyle/>
+                    <a:p>
+                      <a:pPr marL="0" algn="ctr" defTabSz="914400" rtl="0" eaLnBrk="1" latinLnBrk="0" hangingPunct="1"/>
+                      <a:r>
+                        <a:rPr lang="en-US" altLang="zh-TW" sz="1800" kern="1200">
+                          <a:solidFill>
+                            <a:schemeClr val="dk1"/>
+                          </a:solidFill>
+                          <a:latin typeface="Times New Roman" panose="02020603050405020304" pitchFamily="18" charset="0"/>
+                          <a:ea typeface="標楷體" panose="03000509000000000000" pitchFamily="65" charset="-120"/>
+                          <a:cs typeface="Times New Roman" panose="02020603050405020304" pitchFamily="18" charset="0"/>
+                        </a:rPr>
+                        <a:t>Start</a:t>
+                      </a:r>
+                      <a:endParaRPr lang="zh-TW" altLang="en-US" sz="1800" kern="1200">
+                        <a:solidFill>
+                          <a:schemeClr val="dk1"/>
+                        </a:solidFill>
+                        <a:latin typeface="Times New Roman" panose="02020603050405020304" pitchFamily="18" charset="0"/>
+                        <a:ea typeface="標楷體" panose="03000509000000000000" pitchFamily="65" charset="-120"/>
+                        <a:cs typeface="Times New Roman" panose="02020603050405020304" pitchFamily="18" charset="0"/>
+                      </a:endParaRPr>
+                    </a:p>
+                  </a:txBody>
+                  <a:tcPr anchor="ctr"/>
+                </a:tc>
+                <a:tc>
+                  <a:txBody>
+                    <a:bodyPr/>
+                    <a:lstStyle/>
+                    <a:p>
+                      <a:pPr marL="0" algn="ctr" defTabSz="914400" rtl="0" eaLnBrk="1" latinLnBrk="0" hangingPunct="1"/>
+                      <a:endParaRPr lang="zh-TW" altLang="en-US" sz="1800" kern="1200" dirty="0">
+                        <a:solidFill>
+                          <a:schemeClr val="dk1"/>
+                        </a:solidFill>
+                        <a:latin typeface="Times New Roman" panose="02020603050405020304" pitchFamily="18" charset="0"/>
+                        <a:ea typeface="標楷體" panose="03000509000000000000" pitchFamily="65" charset="-120"/>
+                        <a:cs typeface="Times New Roman" panose="02020603050405020304" pitchFamily="18" charset="0"/>
+                      </a:endParaRPr>
+                    </a:p>
+                  </a:txBody>
+                  <a:tcPr anchor="ctr"/>
+                </a:tc>
+                <a:tc>
+                  <a:txBody>
+                    <a:bodyPr/>
+                    <a:lstStyle/>
+                    <a:p>
+                      <a:pPr marL="0" algn="ctr" defTabSz="914400" rtl="0" eaLnBrk="1" latinLnBrk="0" hangingPunct="1"/>
+                      <a:r>
+                        <a:rPr lang="en-US" altLang="zh-TW" sz="1800" kern="1200">
+                          <a:solidFill>
+                            <a:schemeClr val="dk1"/>
+                          </a:solidFill>
+                          <a:latin typeface="Times New Roman" panose="02020603050405020304" pitchFamily="18" charset="0"/>
+                          <a:ea typeface="標楷體" panose="03000509000000000000" pitchFamily="65" charset="-120"/>
+                          <a:cs typeface="Times New Roman" panose="02020603050405020304" pitchFamily="18" charset="0"/>
+                        </a:rPr>
+                        <a:t>-</a:t>
+                      </a:r>
+                      <a:endParaRPr lang="zh-TW" altLang="en-US" sz="1800" kern="1200">
+                        <a:solidFill>
+                          <a:schemeClr val="dk1"/>
+                        </a:solidFill>
+                        <a:latin typeface="Times New Roman" panose="02020603050405020304" pitchFamily="18" charset="0"/>
+                        <a:ea typeface="標楷體" panose="03000509000000000000" pitchFamily="65" charset="-120"/>
+                        <a:cs typeface="Times New Roman" panose="02020603050405020304" pitchFamily="18" charset="0"/>
+                      </a:endParaRPr>
+                    </a:p>
+                  </a:txBody>
+                  <a:tcPr anchor="ctr"/>
+                </a:tc>
+                <a:tc>
+                  <a:txBody>
+                    <a:bodyPr/>
+                    <a:lstStyle/>
+                    <a:p>
+                      <a:pPr marL="0" algn="ctr" defTabSz="914400" rtl="0" eaLnBrk="1" latinLnBrk="0" hangingPunct="1"/>
+                      <a:r>
+                        <a:rPr lang="en-US" altLang="zh-TW" sz="1800" kern="1200" dirty="0">
+                          <a:solidFill>
+                            <a:schemeClr val="dk1"/>
+                          </a:solidFill>
+                          <a:latin typeface="Times New Roman" panose="02020603050405020304" pitchFamily="18" charset="0"/>
+                          <a:ea typeface="標楷體" panose="03000509000000000000" pitchFamily="65" charset="-120"/>
+                          <a:cs typeface="Times New Roman" panose="02020603050405020304" pitchFamily="18" charset="0"/>
+                        </a:rPr>
+                        <a:t>0</a:t>
+                      </a:r>
+                      <a:endParaRPr lang="zh-TW" altLang="en-US" sz="1800" kern="1200" dirty="0">
+                        <a:solidFill>
+                          <a:schemeClr val="dk1"/>
+                        </a:solidFill>
+                        <a:latin typeface="Times New Roman" panose="02020603050405020304" pitchFamily="18" charset="0"/>
+                        <a:ea typeface="標楷體" panose="03000509000000000000" pitchFamily="65" charset="-120"/>
+                        <a:cs typeface="Times New Roman" panose="02020603050405020304" pitchFamily="18" charset="0"/>
+                      </a:endParaRPr>
+                    </a:p>
+                  </a:txBody>
+                  <a:tcPr anchor="ctr"/>
+                </a:tc>
+                <a:tc>
+                  <a:txBody>
+                    <a:bodyPr/>
+                    <a:lstStyle/>
+                    <a:p>
+                      <a:pPr marL="0" algn="ctr" defTabSz="914400" rtl="0" eaLnBrk="1" latinLnBrk="0" hangingPunct="1"/>
+                      <a:r>
+                        <a:rPr lang="en-US" altLang="zh-TW" sz="1800" kern="1200">
+                          <a:solidFill>
+                            <a:schemeClr val="dk1"/>
+                          </a:solidFill>
+                          <a:latin typeface="Times New Roman" panose="02020603050405020304" pitchFamily="18" charset="0"/>
+                          <a:ea typeface="標楷體" panose="03000509000000000000" pitchFamily="65" charset="-120"/>
+                          <a:cs typeface="Times New Roman" panose="02020603050405020304" pitchFamily="18" charset="0"/>
+                        </a:rPr>
+                        <a:t>start</a:t>
+                      </a:r>
+                      <a:endParaRPr lang="zh-TW" altLang="en-US" sz="1800" kern="1200">
+                        <a:solidFill>
+                          <a:schemeClr val="dk1"/>
+                        </a:solidFill>
+                        <a:latin typeface="Times New Roman" panose="02020603050405020304" pitchFamily="18" charset="0"/>
+                        <a:ea typeface="標楷體" panose="03000509000000000000" pitchFamily="65" charset="-120"/>
+                        <a:cs typeface="Times New Roman" panose="02020603050405020304" pitchFamily="18" charset="0"/>
+                      </a:endParaRPr>
+                    </a:p>
+                  </a:txBody>
+                  <a:tcPr anchor="ctr"/>
+                </a:tc>
+                <a:tc>
+                  <a:txBody>
+                    <a:bodyPr/>
+                    <a:lstStyle/>
+                    <a:p>
+                      <a:pPr marL="0" algn="ctr" defTabSz="914400" rtl="0" eaLnBrk="1" latinLnBrk="0" hangingPunct="1"/>
+                      <a:endParaRPr lang="zh-TW" altLang="en-US" sz="1800" kern="1200" dirty="0">
+                        <a:solidFill>
+                          <a:schemeClr val="dk1"/>
+                        </a:solidFill>
+                        <a:latin typeface="Times New Roman" panose="02020603050405020304" pitchFamily="18" charset="0"/>
+                        <a:ea typeface="標楷體" panose="03000509000000000000" pitchFamily="65" charset="-120"/>
+                        <a:cs typeface="Times New Roman" panose="02020603050405020304" pitchFamily="18" charset="0"/>
+                      </a:endParaRPr>
+                    </a:p>
+                  </a:txBody>
+                  <a:tcPr anchor="ctr"/>
+                </a:tc>
+                <a:extLst>
+                  <a:ext uri="{0D108BD9-81ED-4DB2-BD59-A6C34878D82A}">
+                    <a16:rowId xmlns:a16="http://schemas.microsoft.com/office/drawing/2014/main" val="2826334815"/>
+                  </a:ext>
+                </a:extLst>
+              </a:tr>
+              <a:tr h="370840">
+                <a:tc>
+                  <a:txBody>
+                    <a:bodyPr/>
+                    <a:lstStyle/>
+                    <a:p>
+                      <a:pPr marL="0" algn="ctr" defTabSz="914400" rtl="0" eaLnBrk="1" latinLnBrk="0" hangingPunct="1"/>
+                      <a:r>
+                        <a:rPr lang="zh-TW" altLang="en-US" sz="1800" kern="1200" dirty="0">
+                          <a:solidFill>
+                            <a:schemeClr val="dk1"/>
+                          </a:solidFill>
+                          <a:latin typeface="Times New Roman" panose="02020603050405020304" pitchFamily="18" charset="0"/>
+                          <a:ea typeface="標楷體" panose="03000509000000000000" pitchFamily="65" charset="-120"/>
+                          <a:cs typeface="Times New Roman" panose="02020603050405020304" pitchFamily="18" charset="0"/>
+                        </a:rPr>
+                        <a:t>上數</a:t>
+                      </a:r>
+                    </a:p>
+                  </a:txBody>
+                  <a:tcPr anchor="ctr"/>
+                </a:tc>
+                <a:tc>
+                  <a:txBody>
+                    <a:bodyPr/>
+                    <a:lstStyle/>
+                    <a:p>
+                      <a:pPr marL="0" algn="ctr" defTabSz="914400" rtl="0" eaLnBrk="1" latinLnBrk="0" hangingPunct="1"/>
+                      <a:endParaRPr lang="zh-TW" altLang="en-US" sz="1800" kern="1200" dirty="0">
+                        <a:solidFill>
+                          <a:schemeClr val="dk1"/>
+                        </a:solidFill>
+                        <a:latin typeface="Times New Roman" panose="02020603050405020304" pitchFamily="18" charset="0"/>
+                        <a:ea typeface="標楷體" panose="03000509000000000000" pitchFamily="65" charset="-120"/>
+                        <a:cs typeface="Times New Roman" panose="02020603050405020304" pitchFamily="18" charset="0"/>
+                      </a:endParaRPr>
+                    </a:p>
+                  </a:txBody>
+                  <a:tcPr anchor="ctr"/>
+                </a:tc>
+                <a:tc>
+                  <a:txBody>
+                    <a:bodyPr/>
+                    <a:lstStyle/>
+                    <a:p>
+                      <a:pPr marL="0" algn="ctr" defTabSz="914400" rtl="0" eaLnBrk="1" latinLnBrk="0" hangingPunct="1"/>
+                      <a:r>
+                        <a:rPr lang="en-US" altLang="zh-TW" sz="1800" kern="1200">
+                          <a:solidFill>
+                            <a:schemeClr val="dk1"/>
+                          </a:solidFill>
+                          <a:latin typeface="Times New Roman" panose="02020603050405020304" pitchFamily="18" charset="0"/>
+                          <a:ea typeface="標楷體" panose="03000509000000000000" pitchFamily="65" charset="-120"/>
+                          <a:cs typeface="Times New Roman" panose="02020603050405020304" pitchFamily="18" charset="0"/>
+                        </a:rPr>
+                        <a:t>Start</a:t>
+                      </a:r>
+                      <a:endParaRPr lang="zh-TW" altLang="en-US" sz="1800" kern="1200">
+                        <a:solidFill>
+                          <a:schemeClr val="dk1"/>
+                        </a:solidFill>
+                        <a:latin typeface="Times New Roman" panose="02020603050405020304" pitchFamily="18" charset="0"/>
+                        <a:ea typeface="標楷體" panose="03000509000000000000" pitchFamily="65" charset="-120"/>
+                        <a:cs typeface="Times New Roman" panose="02020603050405020304" pitchFamily="18" charset="0"/>
+                      </a:endParaRPr>
+                    </a:p>
+                  </a:txBody>
+                  <a:tcPr anchor="ctr"/>
+                </a:tc>
+                <a:tc>
+                  <a:txBody>
+                    <a:bodyPr/>
+                    <a:lstStyle/>
+                    <a:p>
+                      <a:pPr algn="ctr">
+                        <a:defRPr/>
+                      </a:pPr>
+                      <a:r>
+                        <a:rPr lang="en-US" altLang="zh-TW" sz="1800" dirty="0">
+                          <a:solidFill>
+                            <a:schemeClr val="dk1"/>
+                          </a:solidFill>
+                          <a:latin typeface="Times New Roman" panose="02020603050405020304" pitchFamily="18" charset="0"/>
+                          <a:ea typeface="標楷體" panose="03000509000000000000" pitchFamily="65" charset="-120"/>
+                          <a:cs typeface="Times New Roman" panose="02020603050405020304" pitchFamily="18" charset="0"/>
+                        </a:rPr>
+                        <a:t>10</a:t>
+                      </a:r>
+                      <a:endParaRPr lang="zh-TW" altLang="en-US" sz="1800" kern="1200" dirty="0">
+                        <a:solidFill>
+                          <a:schemeClr val="dk1"/>
+                        </a:solidFill>
+                        <a:latin typeface="Times New Roman" panose="02020603050405020304" pitchFamily="18" charset="0"/>
+                        <a:ea typeface="標楷體" panose="03000509000000000000" pitchFamily="65" charset="-120"/>
+                        <a:cs typeface="Times New Roman" panose="02020603050405020304" pitchFamily="18" charset="0"/>
+                      </a:endParaRPr>
+                    </a:p>
+                  </a:txBody>
+                  <a:tcPr anchor="ctr"/>
+                </a:tc>
+                <a:tc>
+                  <a:txBody>
+                    <a:bodyPr/>
+                    <a:lstStyle/>
+                    <a:p>
+                      <a:pPr marL="0" algn="ctr" defTabSz="914400" rtl="0" eaLnBrk="1" latinLnBrk="0" hangingPunct="1"/>
+                      <a:r>
+                        <a:rPr lang="zh-TW" altLang="en-US" sz="1800" kern="1200" dirty="0">
+                          <a:solidFill>
+                            <a:schemeClr val="dk1"/>
+                          </a:solidFill>
+                          <a:latin typeface="Times New Roman" panose="02020603050405020304" pitchFamily="18" charset="0"/>
+                          <a:ea typeface="標楷體" panose="03000509000000000000" pitchFamily="65" charset="-120"/>
+                          <a:cs typeface="Times New Roman" panose="02020603050405020304" pitchFamily="18" charset="0"/>
+                        </a:rPr>
+                        <a:t>計數器</a:t>
+                      </a:r>
+                      <a:endParaRPr lang="en-US" altLang="zh-TW" sz="1800" kern="1200" dirty="0">
+                        <a:solidFill>
+                          <a:schemeClr val="dk1"/>
+                        </a:solidFill>
+                        <a:latin typeface="Times New Roman" panose="02020603050405020304" pitchFamily="18" charset="0"/>
+                        <a:ea typeface="標楷體" panose="03000509000000000000" pitchFamily="65" charset="-120"/>
+                        <a:cs typeface="Times New Roman" panose="02020603050405020304" pitchFamily="18" charset="0"/>
+                      </a:endParaRPr>
+                    </a:p>
+                    <a:p>
+                      <a:pPr marL="0" algn="ctr" defTabSz="914400" rtl="0" eaLnBrk="1" latinLnBrk="0" hangingPunct="1"/>
+                      <a:r>
+                        <a:rPr lang="en-US" altLang="zh-TW" sz="1800" kern="1200" dirty="0">
+                          <a:solidFill>
+                            <a:schemeClr val="dk1"/>
+                          </a:solidFill>
+                          <a:latin typeface="Times New Roman" panose="02020603050405020304" pitchFamily="18" charset="0"/>
+                          <a:ea typeface="標楷體" panose="03000509000000000000" pitchFamily="65" charset="-120"/>
+                          <a:cs typeface="Times New Roman" panose="02020603050405020304" pitchFamily="18" charset="0"/>
+                        </a:rPr>
+                        <a:t>0~9</a:t>
+                      </a:r>
+                      <a:endParaRPr lang="zh-TW" altLang="en-US" sz="1800" kern="1200" dirty="0">
+                        <a:solidFill>
+                          <a:schemeClr val="dk1"/>
+                        </a:solidFill>
+                        <a:latin typeface="Times New Roman" panose="02020603050405020304" pitchFamily="18" charset="0"/>
+                        <a:ea typeface="標楷體" panose="03000509000000000000" pitchFamily="65" charset="-120"/>
+                        <a:cs typeface="Times New Roman" panose="02020603050405020304" pitchFamily="18" charset="0"/>
+                      </a:endParaRPr>
+                    </a:p>
+                  </a:txBody>
+                  <a:tcPr anchor="ctr"/>
+                </a:tc>
+                <a:tc>
+                  <a:txBody>
+                    <a:bodyPr/>
+                    <a:lstStyle/>
+                    <a:p>
+                      <a:pPr marL="0" marR="0" lvl="0" indent="0" algn="ctr" defTabSz="914400" rtl="0" eaLnBrk="1" fontAlgn="auto" latinLnBrk="0" hangingPunct="1">
+                        <a:lnSpc>
+                          <a:spcPct val="100000"/>
+                        </a:lnSpc>
+                        <a:spcBef>
+                          <a:spcPts val="0"/>
+                        </a:spcBef>
+                        <a:spcAft>
+                          <a:spcPts val="0"/>
+                        </a:spcAft>
+                        <a:buClrTx/>
+                        <a:buSzTx/>
+                        <a:buFontTx/>
+                        <a:buNone/>
+                        <a:tabLst/>
+                        <a:defRPr/>
+                      </a:pPr>
+                      <a:r>
+                        <a:rPr lang="en-US" altLang="zh-TW" sz="1800" kern="1200" dirty="0">
+                          <a:solidFill>
+                            <a:schemeClr val="dk1"/>
+                          </a:solidFill>
+                          <a:latin typeface="Times New Roman" panose="02020603050405020304" pitchFamily="18" charset="0"/>
+                          <a:ea typeface="標楷體" panose="03000509000000000000" pitchFamily="65" charset="-120"/>
+                          <a:cs typeface="Times New Roman" panose="02020603050405020304" pitchFamily="18" charset="0"/>
+                        </a:rPr>
+                        <a:t>in</a:t>
+                      </a:r>
+                      <a:r>
+                        <a:rPr lang="zh-TW" altLang="en-US" sz="1800" kern="1200" dirty="0">
+                          <a:solidFill>
+                            <a:schemeClr val="dk1"/>
+                          </a:solidFill>
+                          <a:latin typeface="Times New Roman" panose="02020603050405020304" pitchFamily="18" charset="0"/>
+                          <a:ea typeface="標楷體" panose="03000509000000000000" pitchFamily="65" charset="-120"/>
+                          <a:cs typeface="Times New Roman" panose="02020603050405020304" pitchFamily="18" charset="0"/>
+                        </a:rPr>
+                        <a:t>：</a:t>
+                      </a:r>
+                      <a:r>
+                        <a:rPr lang="en-US" altLang="zh-TW" sz="1800" b="0" kern="1200" dirty="0" err="1">
+                          <a:solidFill>
+                            <a:schemeClr val="dk1"/>
+                          </a:solidFill>
+                          <a:effectLst/>
+                          <a:latin typeface="+mn-lt"/>
+                          <a:ea typeface="+mn-ea"/>
+                          <a:cs typeface="+mn-cs"/>
+                        </a:rPr>
+                        <a:t>up_count</a:t>
+                      </a:r>
+                      <a:r>
+                        <a:rPr lang="en-US" altLang="zh-TW" sz="1800" b="0" kern="1200" dirty="0">
+                          <a:solidFill>
+                            <a:schemeClr val="dk1"/>
+                          </a:solidFill>
+                          <a:effectLst/>
+                          <a:latin typeface="+mn-lt"/>
+                          <a:ea typeface="+mn-ea"/>
+                          <a:cs typeface="+mn-cs"/>
+                        </a:rPr>
+                        <a:t> </a:t>
+                      </a:r>
+                      <a:r>
+                        <a:rPr lang="zh-TW" altLang="en-US" sz="1800" b="0" kern="1200" dirty="0">
+                          <a:solidFill>
+                            <a:schemeClr val="dk1"/>
+                          </a:solidFill>
+                          <a:effectLst/>
+                          <a:latin typeface="+mn-lt"/>
+                          <a:ea typeface="+mn-ea"/>
+                          <a:cs typeface="+mn-cs"/>
+                        </a:rPr>
+                        <a:t>、</a:t>
+                      </a:r>
+                      <a:r>
+                        <a:rPr lang="en-US" altLang="zh-TW" sz="1800" b="0" kern="1200" dirty="0">
+                          <a:solidFill>
+                            <a:schemeClr val="dk1"/>
+                          </a:solidFill>
+                          <a:effectLst/>
+                          <a:latin typeface="+mn-lt"/>
+                          <a:ea typeface="+mn-ea"/>
+                          <a:cs typeface="+mn-cs"/>
+                        </a:rPr>
+                        <a:t>counter_10</a:t>
+                      </a:r>
+                    </a:p>
+                    <a:p>
+                      <a:pPr marL="0" marR="0" lvl="0" indent="0" algn="ctr" defTabSz="914400" rtl="0" eaLnBrk="1" fontAlgn="auto" latinLnBrk="0" hangingPunct="1">
+                        <a:lnSpc>
+                          <a:spcPct val="100000"/>
+                        </a:lnSpc>
+                        <a:spcBef>
+                          <a:spcPts val="0"/>
+                        </a:spcBef>
+                        <a:spcAft>
+                          <a:spcPts val="0"/>
+                        </a:spcAft>
+                        <a:buClrTx/>
+                        <a:buSzTx/>
+                        <a:buFontTx/>
+                        <a:buNone/>
+                        <a:tabLst/>
+                        <a:defRPr/>
+                      </a:pPr>
+                      <a:r>
+                        <a:rPr lang="en-US" altLang="zh-TW" sz="1800" kern="1200" dirty="0">
+                          <a:solidFill>
+                            <a:schemeClr val="dk1"/>
+                          </a:solidFill>
+                          <a:latin typeface="Times New Roman" panose="02020603050405020304" pitchFamily="18" charset="0"/>
+                          <a:ea typeface="標楷體" panose="03000509000000000000" pitchFamily="65" charset="-120"/>
+                          <a:cs typeface="Times New Roman" panose="02020603050405020304" pitchFamily="18" charset="0"/>
+                        </a:rPr>
+                        <a:t>out</a:t>
+                      </a:r>
+                      <a:r>
+                        <a:rPr lang="zh-TW" altLang="en-US" sz="1800" kern="1200" dirty="0">
+                          <a:solidFill>
+                            <a:schemeClr val="dk1"/>
+                          </a:solidFill>
+                          <a:latin typeface="Times New Roman" panose="02020603050405020304" pitchFamily="18" charset="0"/>
+                          <a:ea typeface="標楷體" panose="03000509000000000000" pitchFamily="65" charset="-120"/>
+                          <a:cs typeface="Times New Roman" panose="02020603050405020304" pitchFamily="18" charset="0"/>
+                        </a:rPr>
+                        <a:t>：</a:t>
+                      </a:r>
+                      <a:r>
+                        <a:rPr lang="en-US" altLang="zh-TW" sz="1800" b="0" kern="1200" dirty="0" err="1">
+                          <a:solidFill>
+                            <a:schemeClr val="dk1"/>
+                          </a:solidFill>
+                          <a:effectLst/>
+                          <a:latin typeface="+mn-lt"/>
+                          <a:ea typeface="+mn-ea"/>
+                          <a:cs typeface="+mn-cs"/>
+                        </a:rPr>
+                        <a:t>up_count</a:t>
+                      </a:r>
+                      <a:r>
+                        <a:rPr lang="en-US" altLang="zh-TW" sz="1800" b="0" kern="1200" dirty="0">
+                          <a:solidFill>
+                            <a:schemeClr val="dk1"/>
+                          </a:solidFill>
+                          <a:effectLst/>
+                          <a:latin typeface="+mn-lt"/>
+                          <a:ea typeface="+mn-ea"/>
+                          <a:cs typeface="+mn-cs"/>
+                        </a:rPr>
+                        <a:t> </a:t>
+                      </a:r>
+                      <a:r>
+                        <a:rPr lang="zh-TW" altLang="en-US" sz="1800" b="0" kern="1200" dirty="0">
+                          <a:solidFill>
+                            <a:schemeClr val="dk1"/>
+                          </a:solidFill>
+                          <a:effectLst/>
+                          <a:latin typeface="+mn-lt"/>
+                          <a:ea typeface="+mn-ea"/>
+                          <a:cs typeface="+mn-cs"/>
+                        </a:rPr>
+                        <a:t>、</a:t>
+                      </a:r>
+                      <a:r>
+                        <a:rPr lang="en-US" altLang="zh-TW" sz="1800" b="0" kern="1200" dirty="0">
+                          <a:solidFill>
+                            <a:schemeClr val="dk1"/>
+                          </a:solidFill>
+                          <a:effectLst/>
+                          <a:latin typeface="+mn-lt"/>
+                          <a:ea typeface="+mn-ea"/>
+                          <a:cs typeface="+mn-cs"/>
+                        </a:rPr>
+                        <a:t>counter_10</a:t>
+                      </a:r>
+                    </a:p>
+                  </a:txBody>
+                  <a:tcPr anchor="ctr"/>
+                </a:tc>
+                <a:extLst>
+                  <a:ext uri="{0D108BD9-81ED-4DB2-BD59-A6C34878D82A}">
+                    <a16:rowId xmlns:a16="http://schemas.microsoft.com/office/drawing/2014/main" val="43804228"/>
+                  </a:ext>
+                </a:extLst>
+              </a:tr>
+              <a:tr h="370840">
+                <a:tc>
+                  <a:txBody>
+                    <a:bodyPr/>
+                    <a:lstStyle/>
+                    <a:p>
+                      <a:pPr marL="0" algn="ctr" defTabSz="914400" rtl="0" eaLnBrk="1" latinLnBrk="0" hangingPunct="1"/>
+                      <a:r>
+                        <a:rPr lang="zh-TW" altLang="en-US" sz="1800" kern="1200" dirty="0">
+                          <a:solidFill>
+                            <a:schemeClr val="dk1"/>
+                          </a:solidFill>
+                          <a:latin typeface="Times New Roman" panose="02020603050405020304" pitchFamily="18" charset="0"/>
+                          <a:ea typeface="標楷體" panose="03000509000000000000" pitchFamily="65" charset="-120"/>
+                          <a:cs typeface="Times New Roman" panose="02020603050405020304" pitchFamily="18" charset="0"/>
+                        </a:rPr>
+                        <a:t>下數</a:t>
+                      </a:r>
+                    </a:p>
+                  </a:txBody>
+                  <a:tcPr anchor="ctr"/>
+                </a:tc>
+                <a:tc>
+                  <a:txBody>
+                    <a:bodyPr/>
+                    <a:lstStyle/>
+                    <a:p>
+                      <a:pPr marL="0" algn="ctr" defTabSz="914400" rtl="0" eaLnBrk="1" latinLnBrk="0" hangingPunct="1"/>
+                      <a:endParaRPr lang="zh-TW" altLang="en-US" sz="1800" kern="1200" dirty="0">
+                        <a:solidFill>
+                          <a:schemeClr val="dk1"/>
+                        </a:solidFill>
+                        <a:latin typeface="Times New Roman" panose="02020603050405020304" pitchFamily="18" charset="0"/>
+                        <a:ea typeface="標楷體" panose="03000509000000000000" pitchFamily="65" charset="-120"/>
+                        <a:cs typeface="Times New Roman" panose="02020603050405020304" pitchFamily="18" charset="0"/>
+                      </a:endParaRPr>
+                    </a:p>
+                  </a:txBody>
+                  <a:tcPr anchor="ctr"/>
+                </a:tc>
+                <a:tc>
+                  <a:txBody>
+                    <a:bodyPr/>
+                    <a:lstStyle/>
+                    <a:p>
+                      <a:pPr marL="0" algn="ctr" defTabSz="914400" rtl="0" eaLnBrk="1" latinLnBrk="0" hangingPunct="1"/>
+                      <a:r>
+                        <a:rPr lang="zh-TW" altLang="en-US" sz="1800" kern="1200" dirty="0">
+                          <a:solidFill>
+                            <a:schemeClr val="dk1"/>
+                          </a:solidFill>
+                          <a:latin typeface="Times New Roman" panose="02020603050405020304" pitchFamily="18" charset="0"/>
+                          <a:ea typeface="標楷體" panose="03000509000000000000" pitchFamily="65" charset="-120"/>
+                          <a:cs typeface="Times New Roman" panose="02020603050405020304" pitchFamily="18" charset="0"/>
+                        </a:rPr>
+                        <a:t>上數</a:t>
+                      </a:r>
+                    </a:p>
+                  </a:txBody>
+                  <a:tcPr anchor="ctr"/>
+                </a:tc>
+                <a:tc>
+                  <a:txBody>
+                    <a:bodyPr/>
+                    <a:lstStyle/>
+                    <a:p>
+                      <a:pPr marL="0" marR="0" lvl="0" indent="0" algn="ctr" defTabSz="914400" rtl="0" eaLnBrk="1" fontAlgn="auto" latinLnBrk="0" hangingPunct="1">
+                        <a:lnSpc>
+                          <a:spcPct val="100000"/>
+                        </a:lnSpc>
+                        <a:spcBef>
+                          <a:spcPts val="0"/>
+                        </a:spcBef>
+                        <a:spcAft>
+                          <a:spcPts val="0"/>
+                        </a:spcAft>
+                        <a:buClrTx/>
+                        <a:buSzTx/>
+                        <a:buFontTx/>
+                        <a:buNone/>
+                        <a:tabLst/>
+                        <a:defRPr/>
+                      </a:pPr>
+                      <a:r>
+                        <a:rPr lang="en-US" altLang="zh-TW" dirty="0">
+                          <a:solidFill>
+                            <a:schemeClr val="dk1"/>
+                          </a:solidFill>
+                          <a:latin typeface="Times New Roman" panose="02020603050405020304" pitchFamily="18" charset="0"/>
+                          <a:ea typeface="標楷體" panose="03000509000000000000" pitchFamily="65" charset="-120"/>
+                          <a:cs typeface="Times New Roman" panose="02020603050405020304" pitchFamily="18" charset="0"/>
+                        </a:rPr>
+                        <a:t>10</a:t>
+                      </a:r>
+                    </a:p>
+                  </a:txBody>
+                  <a:tcPr anchor="ctr"/>
+                </a:tc>
+                <a:tc>
+                  <a:txBody>
+                    <a:bodyPr/>
+                    <a:lstStyle/>
+                    <a:p>
+                      <a:pPr marL="0" algn="ctr" defTabSz="914400" rtl="0" eaLnBrk="1" latinLnBrk="0" hangingPunct="1"/>
+                      <a:r>
+                        <a:rPr lang="zh-TW" altLang="en-US" sz="1800" kern="1200" dirty="0">
+                          <a:solidFill>
+                            <a:schemeClr val="dk1"/>
+                          </a:solidFill>
+                          <a:latin typeface="Times New Roman" panose="02020603050405020304" pitchFamily="18" charset="0"/>
+                          <a:ea typeface="標楷體" panose="03000509000000000000" pitchFamily="65" charset="-120"/>
+                          <a:cs typeface="Times New Roman" panose="02020603050405020304" pitchFamily="18" charset="0"/>
+                        </a:rPr>
+                        <a:t>計數器</a:t>
+                      </a:r>
+                      <a:endParaRPr lang="en-US" altLang="zh-TW" sz="1800" kern="1200" dirty="0">
+                        <a:solidFill>
+                          <a:schemeClr val="dk1"/>
+                        </a:solidFill>
+                        <a:latin typeface="Times New Roman" panose="02020603050405020304" pitchFamily="18" charset="0"/>
+                        <a:ea typeface="標楷體" panose="03000509000000000000" pitchFamily="65" charset="-120"/>
+                        <a:cs typeface="Times New Roman" panose="02020603050405020304" pitchFamily="18" charset="0"/>
+                      </a:endParaRPr>
+                    </a:p>
+                    <a:p>
+                      <a:pPr marL="0" algn="ctr" defTabSz="914400" rtl="0" eaLnBrk="1" latinLnBrk="0" hangingPunct="1"/>
+                      <a:r>
+                        <a:rPr lang="en-US" altLang="zh-TW" sz="1800" kern="1200" dirty="0">
+                          <a:solidFill>
+                            <a:schemeClr val="dk1"/>
+                          </a:solidFill>
+                          <a:latin typeface="Times New Roman" panose="02020603050405020304" pitchFamily="18" charset="0"/>
+                          <a:ea typeface="標楷體" panose="03000509000000000000" pitchFamily="65" charset="-120"/>
+                          <a:cs typeface="Times New Roman" panose="02020603050405020304" pitchFamily="18" charset="0"/>
+                        </a:rPr>
+                        <a:t>9~0</a:t>
+                      </a:r>
+                      <a:endParaRPr lang="zh-TW" altLang="en-US" sz="1800" kern="1200" dirty="0">
+                        <a:solidFill>
+                          <a:schemeClr val="dk1"/>
+                        </a:solidFill>
+                        <a:latin typeface="Times New Roman" panose="02020603050405020304" pitchFamily="18" charset="0"/>
+                        <a:ea typeface="標楷體" panose="03000509000000000000" pitchFamily="65" charset="-120"/>
+                        <a:cs typeface="Times New Roman" panose="02020603050405020304" pitchFamily="18" charset="0"/>
+                      </a:endParaRPr>
+                    </a:p>
+                  </a:txBody>
+                  <a:tcPr anchor="ctr"/>
+                </a:tc>
+                <a:tc>
+                  <a:txBody>
+                    <a:bodyPr/>
+                    <a:lstStyle/>
+                    <a:p>
+                      <a:pPr marL="0" algn="ctr" defTabSz="914400" rtl="0" eaLnBrk="1" latinLnBrk="0" hangingPunct="1"/>
+                      <a:r>
+                        <a:rPr lang="en-US" altLang="zh-TW" sz="1800" kern="1200" dirty="0">
+                          <a:solidFill>
+                            <a:schemeClr val="dk1"/>
+                          </a:solidFill>
+                          <a:latin typeface="Times New Roman" panose="02020603050405020304" pitchFamily="18" charset="0"/>
+                          <a:ea typeface="標楷體" panose="03000509000000000000" pitchFamily="65" charset="-120"/>
+                          <a:cs typeface="Times New Roman" panose="02020603050405020304" pitchFamily="18" charset="0"/>
+                        </a:rPr>
+                        <a:t>in</a:t>
+                      </a:r>
+                      <a:r>
+                        <a:rPr lang="zh-TW" altLang="en-US" sz="1800" kern="1200" dirty="0">
+                          <a:solidFill>
+                            <a:schemeClr val="dk1"/>
+                          </a:solidFill>
+                          <a:latin typeface="Times New Roman" panose="02020603050405020304" pitchFamily="18" charset="0"/>
+                          <a:ea typeface="標楷體" panose="03000509000000000000" pitchFamily="65" charset="-120"/>
+                          <a:cs typeface="Times New Roman" panose="02020603050405020304" pitchFamily="18" charset="0"/>
+                        </a:rPr>
+                        <a:t>：</a:t>
+                      </a:r>
+                      <a:r>
+                        <a:rPr lang="en-US" altLang="zh-TW" sz="1800" b="0" kern="1200" dirty="0">
+                          <a:solidFill>
+                            <a:schemeClr val="dk1"/>
+                          </a:solidFill>
+                          <a:effectLst/>
+                          <a:latin typeface="+mn-lt"/>
+                          <a:ea typeface="+mn-ea"/>
+                          <a:cs typeface="+mn-cs"/>
+                        </a:rPr>
+                        <a:t>counter_10</a:t>
+                      </a:r>
+                      <a:endParaRPr lang="en-US" altLang="zh-TW" sz="1800" kern="1200" dirty="0">
+                        <a:solidFill>
+                          <a:schemeClr val="dk1"/>
+                        </a:solidFill>
+                        <a:latin typeface="Times New Roman" panose="02020603050405020304" pitchFamily="18" charset="0"/>
+                        <a:ea typeface="標楷體" panose="03000509000000000000" pitchFamily="65" charset="-120"/>
+                        <a:cs typeface="Times New Roman" panose="02020603050405020304" pitchFamily="18" charset="0"/>
+                      </a:endParaRPr>
+                    </a:p>
+                    <a:p>
+                      <a:pPr marL="0" algn="ctr" defTabSz="914400" rtl="0" eaLnBrk="1" latinLnBrk="0" hangingPunct="1"/>
+                      <a:r>
+                        <a:rPr lang="en-US" altLang="zh-TW" sz="1800" kern="1200" dirty="0">
+                          <a:solidFill>
+                            <a:schemeClr val="dk1"/>
+                          </a:solidFill>
+                          <a:latin typeface="Times New Roman" panose="02020603050405020304" pitchFamily="18" charset="0"/>
+                          <a:ea typeface="標楷體" panose="03000509000000000000" pitchFamily="65" charset="-120"/>
+                          <a:cs typeface="Times New Roman" panose="02020603050405020304" pitchFamily="18" charset="0"/>
+                        </a:rPr>
+                        <a:t>out</a:t>
+                      </a:r>
+                      <a:r>
+                        <a:rPr lang="zh-TW" altLang="en-US" sz="1800" kern="1200" dirty="0">
+                          <a:solidFill>
+                            <a:schemeClr val="dk1"/>
+                          </a:solidFill>
+                          <a:latin typeface="Times New Roman" panose="02020603050405020304" pitchFamily="18" charset="0"/>
+                          <a:ea typeface="標楷體" panose="03000509000000000000" pitchFamily="65" charset="-120"/>
+                          <a:cs typeface="Times New Roman" panose="02020603050405020304" pitchFamily="18" charset="0"/>
+                        </a:rPr>
+                        <a:t>：</a:t>
+                      </a:r>
+                      <a:r>
+                        <a:rPr lang="en-US" altLang="zh-TW" sz="1800" b="0" kern="1200" dirty="0" err="1">
+                          <a:solidFill>
+                            <a:schemeClr val="dk1"/>
+                          </a:solidFill>
+                          <a:effectLst/>
+                          <a:latin typeface="+mn-lt"/>
+                          <a:ea typeface="+mn-ea"/>
+                          <a:cs typeface="+mn-cs"/>
+                        </a:rPr>
+                        <a:t>up_count</a:t>
+                      </a:r>
+                      <a:r>
+                        <a:rPr lang="en-US" altLang="zh-TW" sz="1800" b="0" kern="1200" dirty="0">
+                          <a:solidFill>
+                            <a:schemeClr val="dk1"/>
+                          </a:solidFill>
+                          <a:effectLst/>
+                          <a:latin typeface="+mn-lt"/>
+                          <a:ea typeface="+mn-ea"/>
+                          <a:cs typeface="+mn-cs"/>
+                        </a:rPr>
+                        <a:t> </a:t>
+                      </a:r>
+                      <a:r>
+                        <a:rPr lang="zh-TW" altLang="en-US" sz="1800" b="0" kern="1200" dirty="0">
+                          <a:solidFill>
+                            <a:schemeClr val="dk1"/>
+                          </a:solidFill>
+                          <a:effectLst/>
+                          <a:latin typeface="+mn-lt"/>
+                          <a:ea typeface="+mn-ea"/>
+                          <a:cs typeface="+mn-cs"/>
+                        </a:rPr>
+                        <a:t>、</a:t>
+                      </a:r>
+                      <a:r>
+                        <a:rPr lang="en-US" altLang="zh-TW" sz="1800" b="0" kern="1200" dirty="0">
+                          <a:solidFill>
+                            <a:schemeClr val="dk1"/>
+                          </a:solidFill>
+                          <a:effectLst/>
+                          <a:latin typeface="+mn-lt"/>
+                          <a:ea typeface="+mn-ea"/>
+                          <a:cs typeface="+mn-cs"/>
+                        </a:rPr>
+                        <a:t>counter_10</a:t>
+                      </a:r>
+                      <a:endParaRPr lang="en-US" altLang="zh-TW" sz="1800" kern="1200" dirty="0">
+                        <a:solidFill>
+                          <a:schemeClr val="dk1"/>
+                        </a:solidFill>
+                        <a:latin typeface="Times New Roman" panose="02020603050405020304" pitchFamily="18" charset="0"/>
+                        <a:ea typeface="標楷體" panose="03000509000000000000" pitchFamily="65" charset="-120"/>
+                        <a:cs typeface="Times New Roman" panose="02020603050405020304" pitchFamily="18" charset="0"/>
+                      </a:endParaRPr>
+                    </a:p>
+                  </a:txBody>
+                  <a:tcPr anchor="ctr"/>
+                </a:tc>
+                <a:extLst>
+                  <a:ext uri="{0D108BD9-81ED-4DB2-BD59-A6C34878D82A}">
+                    <a16:rowId xmlns:a16="http://schemas.microsoft.com/office/drawing/2014/main" val="31628824"/>
+                  </a:ext>
+                </a:extLst>
+              </a:tr>
+            </a:tbl>
+          </a:graphicData>
+        </a:graphic>
+      </p:graphicFrame>
     </p:spTree>
     <p:extLst>
       <p:ext uri="{BB962C8B-B14F-4D97-AF65-F5344CB8AC3E}">
@@ -5820,7 +7213,7 @@
 </p:sld>
 </file>
 
-<file path=ppt/slides/slide6.xml><?xml version="1.0" encoding="utf-8"?>
+<file path=ppt/slides/slide7.xml><?xml version="1.0" encoding="utf-8"?>
 <p:sld xmlns:a="http://schemas.openxmlformats.org/drawingml/2006/main" xmlns:r="http://schemas.openxmlformats.org/officeDocument/2006/relationships" xmlns:p="http://schemas.openxmlformats.org/presentationml/2006/main">
   <p:cSld>
     <p:spTree>
@@ -5877,7 +7270,7 @@
                   <a:srgbClr val="FFFF00"/>
                 </a:highlight>
               </a:rPr>
-              <a:t>2024/11/10</a:t>
+              <a:t>2025/02/05</a:t>
             </a:r>
             <a:r>
               <a:rPr lang="zh-TW" altLang="en-US" dirty="0">
@@ -5947,7 +7340,7 @@
 </p:sld>
 </file>
 
-<file path=ppt/slides/slide7.xml><?xml version="1.0" encoding="utf-8"?>
+<file path=ppt/slides/slide8.xml><?xml version="1.0" encoding="utf-8"?>
 <p:sld xmlns:a="http://schemas.openxmlformats.org/drawingml/2006/main" xmlns:r="http://schemas.openxmlformats.org/officeDocument/2006/relationships" xmlns:p="http://schemas.openxmlformats.org/presentationml/2006/main">
   <p:cSld>
     <p:spTree>
@@ -5998,7 +7391,7 @@
                   <a:srgbClr val="FFFF00"/>
                 </a:highlight>
               </a:rPr>
-              <a:t>2024/11/19</a:t>
+              <a:t>2025/02/05</a:t>
             </a:r>
             <a:r>
               <a:rPr lang="zh-TW" altLang="en-US" sz="4000" dirty="0">
@@ -6068,7 +7461,7 @@
 </p:sld>
 </file>
 
-<file path=ppt/slides/slide8.xml><?xml version="1.0" encoding="utf-8"?>
+<file path=ppt/slides/slide9.xml><?xml version="1.0" encoding="utf-8"?>
 <p:sld xmlns:a="http://schemas.openxmlformats.org/drawingml/2006/main" xmlns:r="http://schemas.openxmlformats.org/officeDocument/2006/relationships" xmlns:p="http://schemas.openxmlformats.org/presentationml/2006/main">
   <p:cSld>
     <p:spTree>
@@ -6113,11 +7506,18 @@
             </a:r>
             <a:r>
               <a:rPr lang="en-US" altLang="zh-TW" sz="3200" dirty="0"/>
-              <a:t>–</a:t>
-            </a:r>
-            <a:r>
-              <a:rPr lang="zh-TW" altLang="en-US" sz="3200" dirty="0"/>
-              <a:t> </a:t>
+              <a:t>(</a:t>
+            </a:r>
+            <a:r>
+              <a:rPr lang="en-US" altLang="zh-TW" sz="3200" dirty="0">
+                <a:solidFill>
+                  <a:srgbClr val="FF0000"/>
+                </a:solidFill>
+                <a:highlight>
+                  <a:srgbClr val="FFFF00"/>
+                </a:highlight>
+              </a:rPr>
+              <a:t>2025/02/05</a:t>
             </a:r>
             <a:r>
               <a:rPr lang="zh-TW" altLang="en-US" sz="3200" dirty="0">
@@ -6128,76 +7528,13 @@
                   <a:srgbClr val="FFFF00"/>
                 </a:highlight>
               </a:rPr>
-              <a:t>週進度項目</a:t>
-            </a:r>
-            <a:r>
-              <a:rPr lang="zh-TW" altLang="en-US" sz="3200" dirty="0"/>
-              <a:t> </a:t>
-            </a:r>
-            <a:r>
-              <a:rPr lang="en-US" altLang="zh-TW" sz="3200" dirty="0"/>
-              <a:t>(</a:t>
-            </a:r>
-            <a:r>
-              <a:rPr lang="en-US" altLang="zh-TW" sz="3200" dirty="0">
-                <a:solidFill>
-                  <a:srgbClr val="FF0000"/>
-                </a:solidFill>
-                <a:highlight>
-                  <a:srgbClr val="FFFF00"/>
-                </a:highlight>
-              </a:rPr>
-              <a:t>2024/11/10</a:t>
+              <a:t>更新</a:t>
             </a:r>
             <a:r>
               <a:rPr lang="en-US" altLang="zh-TW" sz="3200" dirty="0"/>
               <a:t>)</a:t>
             </a:r>
             <a:endParaRPr lang="zh-TW" altLang="en-US" sz="3200" dirty="0"/>
-          </a:p>
-        </p:txBody>
-      </p:sp>
-      <p:sp>
-        <p:nvSpPr>
-          <p:cNvPr id="10" name="內容版面配置區 1">
-            <a:extLst>
-              <a:ext uri="{FF2B5EF4-FFF2-40B4-BE49-F238E27FC236}">
-                <a16:creationId xmlns:a16="http://schemas.microsoft.com/office/drawing/2014/main" id="{7525C5FA-E5AD-4056-9857-68D56781A774}"/>
-              </a:ext>
-            </a:extLst>
-          </p:cNvPr>
-          <p:cNvSpPr>
-            <a:spLocks noGrp="1"/>
-          </p:cNvSpPr>
-          <p:nvPr>
-            <p:ph idx="1"/>
-          </p:nvPr>
-        </p:nvSpPr>
-        <p:spPr>
-          <a:xfrm>
-            <a:off x="838200" y="1201850"/>
-            <a:ext cx="10515600" cy="5037776"/>
-          </a:xfrm>
-        </p:spPr>
-        <p:txBody>
-          <a:bodyPr>
-            <a:normAutofit/>
-          </a:bodyPr>
-          <a:lstStyle/>
-          <a:p>
-            <a:r>
-              <a:rPr lang="zh-TW" altLang="en-US" dirty="0">
-                <a:solidFill>
-                  <a:srgbClr val="FF0000"/>
-                </a:solidFill>
-              </a:rPr>
-              <a:t>試題一</a:t>
-            </a:r>
-            <a:endParaRPr lang="en-US" altLang="zh-TW" dirty="0">
-              <a:solidFill>
-                <a:srgbClr val="FF0000"/>
-              </a:solidFill>
-            </a:endParaRPr>
           </a:p>
         </p:txBody>
       </p:sp>
@@ -6231,179 +7568,12 @@
           </a:prstGeom>
         </p:spPr>
       </p:pic>
-    </p:spTree>
-    <p:extLst>
-      <p:ext uri="{BB962C8B-B14F-4D97-AF65-F5344CB8AC3E}">
-        <p14:creationId xmlns:p14="http://schemas.microsoft.com/office/powerpoint/2010/main" val="2648098688"/>
-      </p:ext>
-    </p:extLst>
-  </p:cSld>
-  <p:clrMapOvr>
-    <a:masterClrMapping/>
-  </p:clrMapOvr>
-</p:sld>
-</file>
-
-<file path=ppt/slides/slide9.xml><?xml version="1.0" encoding="utf-8"?>
-<p:sld xmlns:a="http://schemas.openxmlformats.org/drawingml/2006/main" xmlns:r="http://schemas.openxmlformats.org/officeDocument/2006/relationships" xmlns:p="http://schemas.openxmlformats.org/presentationml/2006/main">
-  <p:cSld>
-    <p:spTree>
-      <p:nvGrpSpPr>
-        <p:cNvPr id="1" name=""/>
-        <p:cNvGrpSpPr/>
-        <p:nvPr/>
-      </p:nvGrpSpPr>
-      <p:grpSpPr>
-        <a:xfrm>
-          <a:off x="0" y="0"/>
-          <a:ext cx="0" cy="0"/>
-          <a:chOff x="0" y="0"/>
-          <a:chExt cx="0" cy="0"/>
-        </a:xfrm>
-      </p:grpSpPr>
-      <p:sp>
-        <p:nvSpPr>
-          <p:cNvPr id="2" name="內容版面配置區 1"/>
-          <p:cNvSpPr>
-            <a:spLocks noGrp="1"/>
-          </p:cNvSpPr>
-          <p:nvPr>
-            <p:ph idx="1"/>
-          </p:nvPr>
-        </p:nvSpPr>
-        <p:spPr>
-          <a:xfrm>
-            <a:off x="838199" y="1201850"/>
-            <a:ext cx="11048999" cy="5026422"/>
-          </a:xfrm>
-        </p:spPr>
-        <p:txBody>
-          <a:bodyPr/>
-          <a:lstStyle/>
-          <a:p>
-            <a:r>
-              <a:rPr lang="en-US" altLang="zh-TW" dirty="0"/>
-              <a:t>Q1</a:t>
-            </a:r>
-            <a:r>
-              <a:rPr lang="zh-TW" altLang="en-US" dirty="0"/>
-              <a:t>：製作第二題時，可以上數，無法下數。</a:t>
-            </a:r>
-            <a:r>
-              <a:rPr lang="en-US" altLang="zh-TW" dirty="0"/>
-              <a:t> [</a:t>
-            </a:r>
-            <a:r>
-              <a:rPr lang="zh-TW" altLang="en-US" dirty="0"/>
-              <a:t>圖</a:t>
-            </a:r>
-            <a:r>
-              <a:rPr lang="en-US" altLang="zh-TW" dirty="0"/>
-              <a:t>1]</a:t>
-            </a:r>
-            <a:br>
-              <a:rPr lang="en-US" altLang="zh-TW" dirty="0"/>
-            </a:br>
-            <a:endParaRPr lang="en-US" altLang="zh-TW" dirty="0"/>
-          </a:p>
-          <a:p>
-            <a:endParaRPr lang="en-US" altLang="zh-TW" sz="1200" dirty="0"/>
-          </a:p>
-          <a:p>
-            <a:endParaRPr lang="en-US" altLang="zh-TW" sz="1200" dirty="0"/>
-          </a:p>
-          <a:p>
-            <a:endParaRPr lang="en-US" altLang="zh-TW" sz="1200" dirty="0"/>
-          </a:p>
-          <a:p>
-            <a:endParaRPr lang="en-US" altLang="zh-TW" sz="1200" dirty="0"/>
-          </a:p>
-          <a:p>
-            <a:endParaRPr lang="en-US" altLang="zh-TW" sz="1200" dirty="0"/>
-          </a:p>
-          <a:p>
-            <a:endParaRPr lang="en-US" altLang="zh-TW" sz="1200" dirty="0"/>
-          </a:p>
-          <a:p>
-            <a:endParaRPr lang="en-US" altLang="zh-TW" sz="1200" dirty="0"/>
-          </a:p>
-          <a:p>
-            <a:endParaRPr lang="en-US" altLang="zh-TW" sz="1200" dirty="0"/>
-          </a:p>
-          <a:p>
-            <a:endParaRPr lang="en-US" altLang="zh-TW" sz="1200" dirty="0"/>
-          </a:p>
-          <a:p>
-            <a:endParaRPr lang="en-US" altLang="zh-TW" sz="1200" dirty="0"/>
-          </a:p>
-          <a:p>
-            <a:endParaRPr lang="en-US" altLang="zh-TW" sz="1200" dirty="0"/>
-          </a:p>
-          <a:p>
-            <a:endParaRPr lang="en-US" altLang="zh-TW" sz="1200" dirty="0"/>
-          </a:p>
-          <a:p>
-            <a:pPr marL="0" indent="0">
-              <a:buNone/>
-            </a:pPr>
-            <a:endParaRPr lang="en-US" altLang="zh-TW" sz="1200" dirty="0"/>
-          </a:p>
-          <a:p>
-            <a:pPr marL="0" indent="0">
-              <a:buNone/>
-            </a:pPr>
-            <a:endParaRPr lang="en-US" altLang="zh-TW" sz="1200" dirty="0"/>
-          </a:p>
-        </p:txBody>
-      </p:sp>
-      <p:sp>
-        <p:nvSpPr>
-          <p:cNvPr id="3" name="標題 2"/>
-          <p:cNvSpPr>
-            <a:spLocks noGrp="1"/>
-          </p:cNvSpPr>
-          <p:nvPr>
-            <p:ph type="title"/>
-          </p:nvPr>
-        </p:nvSpPr>
-        <p:spPr/>
-        <p:txBody>
-          <a:bodyPr/>
-          <a:lstStyle/>
-          <a:p>
-            <a:r>
-              <a:rPr lang="zh-TW" altLang="en-US" dirty="0"/>
-              <a:t>問題記錄 </a:t>
-            </a:r>
-            <a:r>
-              <a:rPr lang="en-US" altLang="zh-TW" dirty="0"/>
-              <a:t>(</a:t>
-            </a:r>
-            <a:r>
-              <a:rPr lang="zh-TW" altLang="en-US" dirty="0">
-                <a:solidFill>
-                  <a:srgbClr val="FF0000"/>
-                </a:solidFill>
-                <a:highlight>
-                  <a:srgbClr val="FFFF00"/>
-                </a:highlight>
-              </a:rPr>
-              <a:t>軟體問題</a:t>
-            </a:r>
-            <a:r>
-              <a:rPr lang="en-US" altLang="zh-TW" dirty="0"/>
-              <a:t>)</a:t>
-            </a:r>
-            <a:endParaRPr lang="zh-TW" altLang="en-US" dirty="0"/>
-          </a:p>
-        </p:txBody>
-      </p:sp>
-      <p:sp>
-        <p:nvSpPr>
-          <p:cNvPr id="17" name="矩形 16">
+      <p:sp>
+        <p:nvSpPr>
+          <p:cNvPr id="4" name="矩形 3">
             <a:extLst>
               <a:ext uri="{FF2B5EF4-FFF2-40B4-BE49-F238E27FC236}">
-                <a16:creationId xmlns:a16="http://schemas.microsoft.com/office/drawing/2014/main" id="{D93CB8E4-DED4-4E55-B426-B2D6694EE6B7}"/>
+                <a16:creationId xmlns:a16="http://schemas.microsoft.com/office/drawing/2014/main" id="{0AA4D13F-24DA-9B87-CC87-1BED33710361}"/>
               </a:ext>
             </a:extLst>
           </p:cNvPr>
@@ -6412,91 +7582,172 @@
         </p:nvSpPr>
         <p:spPr>
           <a:xfrm>
-            <a:off x="5493912" y="4081108"/>
-            <a:ext cx="1204176" cy="369332"/>
+            <a:off x="2998176" y="3027466"/>
+            <a:ext cx="1644162" cy="1814184"/>
           </a:xfrm>
           <a:prstGeom prst="rect">
             <a:avLst/>
           </a:prstGeom>
+          <a:noFill/>
+          <a:ln w="38100">
+            <a:solidFill>
+              <a:srgbClr val="FF0000"/>
+            </a:solidFill>
+          </a:ln>
         </p:spPr>
-        <p:txBody>
-          <a:bodyPr wrap="none">
-            <a:spAutoFit/>
-          </a:bodyPr>
+        <p:style>
+          <a:lnRef idx="2">
+            <a:schemeClr val="accent1">
+              <a:shade val="15000"/>
+            </a:schemeClr>
+          </a:lnRef>
+          <a:fillRef idx="1">
+            <a:schemeClr val="accent1"/>
+          </a:fillRef>
+          <a:effectRef idx="0">
+            <a:schemeClr val="accent1"/>
+          </a:effectRef>
+          <a:fontRef idx="minor">
+            <a:schemeClr val="lt1"/>
+          </a:fontRef>
+        </p:style>
+        <p:txBody>
+          <a:bodyPr rtlCol="0" anchor="ctr"/>
           <a:lstStyle/>
           <a:p>
             <a:pPr algn="ctr"/>
-            <a:r>
-              <a:rPr lang="en-US" altLang="zh-TW" dirty="0">
-                <a:latin typeface="Times New Roman" panose="02020603050405020304" pitchFamily="18" charset="0"/>
-                <a:ea typeface="標楷體" panose="03000509000000000000" pitchFamily="65" charset="-120"/>
-              </a:rPr>
-              <a:t>[</a:t>
-            </a:r>
-            <a:r>
-              <a:rPr lang="zh-TW" altLang="en-US" dirty="0">
-                <a:latin typeface="Times New Roman" panose="02020603050405020304" pitchFamily="18" charset="0"/>
-                <a:ea typeface="標楷體" panose="03000509000000000000" pitchFamily="65" charset="-120"/>
-              </a:rPr>
-              <a:t>圖</a:t>
-            </a:r>
-            <a:r>
-              <a:rPr lang="en-US" altLang="zh-TW" dirty="0">
-                <a:latin typeface="Times New Roman" panose="02020603050405020304" pitchFamily="18" charset="0"/>
-                <a:ea typeface="標楷體" panose="03000509000000000000" pitchFamily="65" charset="-120"/>
-              </a:rPr>
-              <a:t>1]</a:t>
-            </a:r>
-            <a:r>
-              <a:rPr lang="zh-TW" altLang="en-US" dirty="0">
-                <a:latin typeface="Times New Roman" panose="02020603050405020304" pitchFamily="18" charset="0"/>
-                <a:ea typeface="標楷體" panose="03000509000000000000" pitchFamily="65" charset="-120"/>
-              </a:rPr>
-              <a:t> 問題</a:t>
-            </a:r>
-          </a:p>
-        </p:txBody>
-      </p:sp>
-      <p:pic>
-        <p:nvPicPr>
-          <p:cNvPr id="5" name="圖片 4" descr="一張含有 螢幕擷取畫面, 多媒體軟體 的圖片&#10;&#10;自動產生的描述">
+            <a:endParaRPr lang="zh-TW" altLang="en-US"/>
+          </a:p>
+        </p:txBody>
+      </p:sp>
+      <p:sp>
+        <p:nvSpPr>
+          <p:cNvPr id="5" name="文字方塊 4">
             <a:extLst>
               <a:ext uri="{FF2B5EF4-FFF2-40B4-BE49-F238E27FC236}">
-                <a16:creationId xmlns:a16="http://schemas.microsoft.com/office/drawing/2014/main" id="{E1F3A329-73C7-A0B9-5840-4FC9040D30A0}"/>
+                <a16:creationId xmlns:a16="http://schemas.microsoft.com/office/drawing/2014/main" id="{10676426-A5C3-55C6-DC45-1D1B00A4B3D6}"/>
               </a:ext>
             </a:extLst>
           </p:cNvPr>
-          <p:cNvPicPr>
-            <a:picLocks noChangeAspect="1"/>
-          </p:cNvPicPr>
+          <p:cNvSpPr txBox="1"/>
           <p:nvPr/>
-        </p:nvPicPr>
-        <p:blipFill>
-          <a:blip r:embed="rId3">
-            <a:extLst>
-              <a:ext uri="{28A0092B-C50C-407E-A947-70E740481C1C}">
-                <a14:useLocalDpi xmlns:a14="http://schemas.microsoft.com/office/drawing/2010/main" val="0"/>
-              </a:ext>
-            </a:extLst>
-          </a:blip>
-          <a:stretch>
-            <a:fillRect/>
-          </a:stretch>
-        </p:blipFill>
+        </p:nvSpPr>
         <p:spPr>
           <a:xfrm>
-            <a:off x="919715" y="1571182"/>
-            <a:ext cx="9830056" cy="2521056"/>
+            <a:off x="2998176" y="4336092"/>
+            <a:ext cx="1644162" cy="369332"/>
           </a:xfrm>
           <a:prstGeom prst="rect">
             <a:avLst/>
           </a:prstGeom>
+          <a:noFill/>
         </p:spPr>
-      </p:pic>
+        <p:txBody>
+          <a:bodyPr wrap="square" rtlCol="0">
+            <a:spAutoFit/>
+          </a:bodyPr>
+          <a:lstStyle/>
+          <a:p>
+            <a:pPr algn="ctr"/>
+            <a:r>
+              <a:rPr lang="zh-TW" altLang="en-US" dirty="0"/>
+              <a:t>上數</a:t>
+            </a:r>
+          </a:p>
+        </p:txBody>
+      </p:sp>
+      <p:sp>
+        <p:nvSpPr>
+          <p:cNvPr id="6" name="矩形 5">
+            <a:extLst>
+              <a:ext uri="{FF2B5EF4-FFF2-40B4-BE49-F238E27FC236}">
+                <a16:creationId xmlns:a16="http://schemas.microsoft.com/office/drawing/2014/main" id="{B68F1F94-400A-C038-2194-7EFCDBD8D15D}"/>
+              </a:ext>
+            </a:extLst>
+          </p:cNvPr>
+          <p:cNvSpPr/>
+          <p:nvPr/>
+        </p:nvSpPr>
+        <p:spPr>
+          <a:xfrm>
+            <a:off x="4658457" y="3027466"/>
+            <a:ext cx="1531328" cy="1814184"/>
+          </a:xfrm>
+          <a:prstGeom prst="rect">
+            <a:avLst/>
+          </a:prstGeom>
+          <a:noFill/>
+          <a:ln w="38100">
+            <a:solidFill>
+              <a:srgbClr val="FF0000"/>
+            </a:solidFill>
+          </a:ln>
+        </p:spPr>
+        <p:style>
+          <a:lnRef idx="2">
+            <a:schemeClr val="accent1">
+              <a:shade val="15000"/>
+            </a:schemeClr>
+          </a:lnRef>
+          <a:fillRef idx="1">
+            <a:schemeClr val="accent1"/>
+          </a:fillRef>
+          <a:effectRef idx="0">
+            <a:schemeClr val="accent1"/>
+          </a:effectRef>
+          <a:fontRef idx="minor">
+            <a:schemeClr val="lt1"/>
+          </a:fontRef>
+        </p:style>
+        <p:txBody>
+          <a:bodyPr rtlCol="0" anchor="ctr"/>
+          <a:lstStyle/>
+          <a:p>
+            <a:pPr algn="ctr"/>
+            <a:endParaRPr lang="zh-TW" altLang="en-US"/>
+          </a:p>
+        </p:txBody>
+      </p:sp>
+      <p:sp>
+        <p:nvSpPr>
+          <p:cNvPr id="7" name="文字方塊 6">
+            <a:extLst>
+              <a:ext uri="{FF2B5EF4-FFF2-40B4-BE49-F238E27FC236}">
+                <a16:creationId xmlns:a16="http://schemas.microsoft.com/office/drawing/2014/main" id="{CB3F7AAA-87BC-EE96-AE2E-4F00128D4B95}"/>
+              </a:ext>
+            </a:extLst>
+          </p:cNvPr>
+          <p:cNvSpPr txBox="1"/>
+          <p:nvPr/>
+        </p:nvSpPr>
+        <p:spPr>
+          <a:xfrm>
+            <a:off x="4642338" y="4355765"/>
+            <a:ext cx="1644162" cy="369332"/>
+          </a:xfrm>
+          <a:prstGeom prst="rect">
+            <a:avLst/>
+          </a:prstGeom>
+          <a:noFill/>
+        </p:spPr>
+        <p:txBody>
+          <a:bodyPr wrap="square" rtlCol="0">
+            <a:spAutoFit/>
+          </a:bodyPr>
+          <a:lstStyle/>
+          <a:p>
+            <a:pPr algn="ctr"/>
+            <a:r>
+              <a:rPr lang="zh-TW" altLang="en-US" dirty="0"/>
+              <a:t>下數</a:t>
+            </a:r>
+          </a:p>
+        </p:txBody>
+      </p:sp>
     </p:spTree>
     <p:extLst>
       <p:ext uri="{BB962C8B-B14F-4D97-AF65-F5344CB8AC3E}">
-        <p14:creationId xmlns:p14="http://schemas.microsoft.com/office/powerpoint/2010/main" val="1403700655"/>
+        <p14:creationId xmlns:p14="http://schemas.microsoft.com/office/powerpoint/2010/main" val="2648098688"/>
       </p:ext>
     </p:extLst>
   </p:cSld>
